--- a/public/fun/pack/pptx/birthdaypro/돌잔치프리미엄_16_성장기록중심_마린화이트.pptx
+++ b/public/fun/pack/pptx/birthdaypro/돌잔치프리미엄_16_성장기록중심_마린화이트.pptx
@@ -112,12 +112,12 @@
   <p:extLst>
     <p:ext uri="{521415D9-36F7-43E2-AB2F-B90AF26B5E84}">
       <p14:sectionLst xmlns:p14="http://schemas.microsoft.com/office/powerpoint/2010/main">
-        <p14:section name="시작" id="{A6BE8484-CD9A-4964-B616-6D0F8DE07705}">
+        <p14:section name="시작" id="{DD70B97F-A32D-44DD-BD93-668330BAF6CC}">
           <p14:sldIdLst>
             <p14:sldId id="256"/>
           </p14:sldIdLst>
         </p14:section>
-        <p14:section name="본문" id="{7B80AE39-B2FB-431B-B853-AB12FD7A3D53}">
+        <p14:section name="본문" id="{0F67E27E-C6A8-4D13-BCBA-B0735146796D}">
           <p14:sldIdLst>
             <p14:sldId id="257"/>
             <p14:sldId id="258"/>
@@ -125,7 +125,7 @@
             <p14:sldId id="260"/>
           </p14:sldIdLst>
         </p14:section>
-        <p14:section name="마무리" id="{D80EB8E2-8DA1-43E5-BCFF-7E875D2EE915}">
+        <p14:section name="마무리" id="{6649008E-5A85-4F5F-89E2-86240C1E0DE5}">
           <p14:sldIdLst>
             <p14:sldId id="261"/>
           </p14:sldIdLst>
@@ -1538,7 +1538,7 @@
             </a:lvl1pPr>
           </a:lstStyle>
           <a:p>
-            <a:fld id="{FDE40ECF-3AC1-4795-A0BB-877B2738C2D5}" type="slidenum">
+            <a:fld id="{AD65215B-72CA-4478-B27E-56143D568C91}" type="slidenum">
               <a:rPr lang="en-US"/>
               <a:t>‹#›</a:t>
             </a:fld>
@@ -2175,7 +2175,7 @@
             </a:lvl1pPr>
           </a:lstStyle>
           <a:p>
-            <a:fld id="{0FC30BA9-9329-4534-8953-358E6626403B}" type="slidenum">
+            <a:fld id="{434FB5CD-728D-4CBD-A3D9-255B1373DFA0}" type="slidenum">
               <a:rPr lang="en-US"/>
               <a:t>‹#›</a:t>
             </a:fld>
@@ -2863,7 +2863,7 @@
             </a:lvl1pPr>
           </a:lstStyle>
           <a:p>
-            <a:fld id="{009BF382-09A8-4C78-A443-4D2D436E1E8D}" type="slidenum">
+            <a:fld id="{5832670B-F948-4461-B96A-3248BBC4253A}" type="slidenum">
               <a:rPr lang="en-US"/>
               <a:t>‹#›</a:t>
             </a:fld>
@@ -3774,7 +3774,7 @@
           <a:p>
             <a:r>
               <a:rPr lang="ko-KR"/>
-              <a:t>아기 이름 · 0000. 00. 00</a:t>
+              <a:t>아기 이름 · 날짜 입력</a:t>
             </a:r>
           </a:p>
           <a:p>
@@ -3935,7 +3935,7 @@
           <a:bodyPr/>
           <a:lstStyle/>
           <a:p>
-            <a:fld id="{B56494E2-5334-438B-AC63-4090722856C5}" type="slidenum">
+            <a:fld id="{BE7D6E31-E60A-444E-A80A-62CBE21B2CB9}" type="slidenum">
               <a:rPr lang="en-US"/>
               <a:t>‹#›</a:t>
             </a:fld>
@@ -4535,7 +4535,7 @@
           <a:bodyPr/>
           <a:lstStyle/>
           <a:p>
-            <a:fld id="{5E89B055-2901-4DE9-9261-DFC821C93C10}" type="slidenum">
+            <a:fld id="{E300B8E4-17F8-44A6-8B21-E02B15C93513}" type="slidenum">
               <a:rPr lang="en-US"/>
               <a:t>‹#›</a:t>
             </a:fld>
@@ -5555,7 +5555,7 @@
           <a:bodyPr/>
           <a:lstStyle/>
           <a:p>
-            <a:fld id="{F9C26BD2-7A15-452F-977C-C8719FF48A7D}" type="slidenum">
+            <a:fld id="{B4D38D83-BF46-431F-96F4-B0B2F8AA5262}" type="slidenum">
               <a:rPr lang="en-US"/>
               <a:t>‹#›</a:t>
             </a:fld>
@@ -6230,7 +6230,7 @@
           <a:bodyPr/>
           <a:lstStyle/>
           <a:p>
-            <a:fld id="{ADBE07E8-5380-47C6-8229-23413D747E85}" type="slidenum">
+            <a:fld id="{072C0BFE-A19F-43DC-9BB5-2D479D121880}" type="slidenum">
               <a:rPr lang="en-US"/>
               <a:t>‹#›</a:t>
             </a:fld>
